--- a/Day12-GenAI-Intro-LLMs-and-Tokens/Day12_Deck_GenAI_Intro_LLMs_and_Tokens.pptx
+++ b/Day12-GenAI-Intro-LLMs-and-Tokens/Day12_Deck_GenAI_Intro_LLMs_and_Tokens.pptx
@@ -7849,13 +7849,13 @@
           <a:noFill/>
         </p:spPr>
         <p:txBody>
-          <a:bodyPr wrap="square" lIns="0" rIns="0" tIns="0" bIns="0" anchor="t">
-            <a:spAutoFit/>
-          </a:bodyPr>
-          <a:lstStyle/>
-          <a:p>
-            <a:r>
-              <a:rPr sz="1085" b="0" i="0">
+          <a:bodyPr wrap="none" lIns="0" rIns="0" tIns="0" bIns="0" anchor="t">
+            <a:spAutoFit/>
+          </a:bodyPr>
+          <a:lstStyle/>
+          <a:p>
+            <a:r>
+              <a:rPr sz="954" b="0" i="0">
                 <a:solidFill>
                   <a:srgbClr val="EAF7F5"/>
                 </a:solidFill>
@@ -7866,7 +7866,7 @@
           </a:p>
           <a:p>
             <a:r>
-              <a:rPr sz="1085" b="0" i="0">
+              <a:rPr sz="954" b="0" i="0">
                 <a:solidFill>
                   <a:srgbClr val="EAF7F5"/>
                 </a:solidFill>
@@ -7877,7 +7877,7 @@
           </a:p>
           <a:p>
             <a:r>
-              <a:rPr sz="1085" b="0" i="0">
+              <a:rPr sz="954" b="0" i="0">
                 <a:solidFill>
                   <a:srgbClr val="EAF7F5"/>
                 </a:solidFill>
@@ -7888,7 +7888,7 @@
           </a:p>
           <a:p>
             <a:r>
-              <a:rPr sz="1085" b="0" i="0">
+              <a:rPr sz="954" b="0" i="0">
                 <a:solidFill>
                   <a:srgbClr val="EAF7F5"/>
                 </a:solidFill>
@@ -7899,7 +7899,7 @@
           </a:p>
           <a:p>
             <a:r>
-              <a:rPr sz="1085" b="0" i="0">
+              <a:rPr sz="954" b="0" i="0">
                 <a:solidFill>
                   <a:srgbClr val="EAF7F5"/>
                 </a:solidFill>
@@ -7910,7 +7910,7 @@
           </a:p>
           <a:p>
             <a:r>
-              <a:rPr sz="1085" b="0" i="0">
+              <a:rPr sz="954" b="0" i="0">
                 <a:solidFill>
                   <a:srgbClr val="EAF7F5"/>
                 </a:solidFill>
@@ -11855,13 +11855,13 @@
           <a:noFill/>
         </p:spPr>
         <p:txBody>
-          <a:bodyPr wrap="square" lIns="0" rIns="0" tIns="0" bIns="0" anchor="t">
-            <a:spAutoFit/>
-          </a:bodyPr>
-          <a:lstStyle/>
-          <a:p>
-            <a:r>
-              <a:rPr sz="1258" b="0" i="0">
+          <a:bodyPr wrap="none" lIns="0" rIns="0" tIns="0" bIns="0" anchor="t">
+            <a:spAutoFit/>
+          </a:bodyPr>
+          <a:lstStyle/>
+          <a:p>
+            <a:r>
+              <a:rPr sz="1107" b="0" i="0">
                 <a:solidFill>
                   <a:srgbClr val="EAF7F5"/>
                 </a:solidFill>
@@ -11872,7 +11872,7 @@
           </a:p>
           <a:p>
             <a:r>
-              <a:rPr sz="1258" b="0" i="0">
+              <a:rPr sz="1107" b="0" i="0">
                 <a:solidFill>
                   <a:srgbClr val="EAF7F5"/>
                 </a:solidFill>
@@ -11883,7 +11883,7 @@
           </a:p>
           <a:p>
             <a:r>
-              <a:rPr sz="1258" b="0" i="0">
+              <a:rPr sz="1107" b="0" i="0">
                 <a:solidFill>
                   <a:srgbClr val="EAF7F5"/>
                 </a:solidFill>
@@ -11894,7 +11894,7 @@
           </a:p>
           <a:p>
             <a:r>
-              <a:rPr sz="1258" b="0" i="0">
+              <a:rPr sz="1107" b="0" i="0">
                 <a:solidFill>
                   <a:srgbClr val="EAF7F5"/>
                 </a:solidFill>
@@ -11905,7 +11905,7 @@
           </a:p>
           <a:p>
             <a:r>
-              <a:rPr sz="1258" b="0" i="0">
+              <a:rPr sz="1107" b="0" i="0">
                 <a:solidFill>
                   <a:srgbClr val="EAF7F5"/>
                 </a:solidFill>
@@ -11916,7 +11916,7 @@
           </a:p>
           <a:p>
             <a:r>
-              <a:rPr sz="1258" b="0" i="0">
+              <a:rPr sz="1107" b="0" i="0">
                 <a:solidFill>
                   <a:srgbClr val="EAF7F5"/>
                 </a:solidFill>
@@ -11927,7 +11927,7 @@
           </a:p>
           <a:p>
             <a:r>
-              <a:rPr sz="1258" b="0" i="0">
+              <a:rPr sz="1107" b="0" i="0">
                 <a:solidFill>
                   <a:srgbClr val="EAF7F5"/>
                 </a:solidFill>
@@ -11938,7 +11938,7 @@
           </a:p>
           <a:p>
             <a:r>
-              <a:rPr sz="1258" b="0" i="0">
+              <a:rPr sz="1107" b="0" i="0">
                 <a:solidFill>
                   <a:srgbClr val="EAF7F5"/>
                 </a:solidFill>
@@ -11949,7 +11949,7 @@
           </a:p>
           <a:p>
             <a:r>
-              <a:rPr sz="1258" b="0" i="0">
+              <a:rPr sz="1107" b="0" i="0">
                 <a:solidFill>
                   <a:srgbClr val="EAF7F5"/>
                 </a:solidFill>
@@ -12399,13 +12399,13 @@
           <a:noFill/>
         </p:spPr>
         <p:txBody>
-          <a:bodyPr wrap="square" lIns="0" rIns="0" tIns="0" bIns="0" anchor="t">
-            <a:spAutoFit/>
-          </a:bodyPr>
-          <a:lstStyle/>
-          <a:p>
-            <a:r>
-              <a:rPr sz="879" b="0" i="0">
+          <a:bodyPr wrap="none" lIns="0" rIns="0" tIns="0" bIns="0" anchor="t">
+            <a:spAutoFit/>
+          </a:bodyPr>
+          <a:lstStyle/>
+          <a:p>
+            <a:r>
+              <a:rPr sz="773" b="0" i="0">
                 <a:solidFill>
                   <a:srgbClr val="EAF7F5"/>
                 </a:solidFill>
@@ -12416,7 +12416,7 @@
           </a:p>
           <a:p>
             <a:r>
-              <a:rPr sz="879" b="0" i="0">
+              <a:rPr sz="773" b="0" i="0">
                 <a:solidFill>
                   <a:srgbClr val="EAF7F5"/>
                 </a:solidFill>
@@ -12427,7 +12427,7 @@
           </a:p>
           <a:p>
             <a:r>
-              <a:rPr sz="879" b="0" i="0">
+              <a:rPr sz="773" b="0" i="0">
                 <a:solidFill>
                   <a:srgbClr val="EAF7F5"/>
                 </a:solidFill>
@@ -12438,7 +12438,7 @@
           </a:p>
           <a:p>
             <a:r>
-              <a:rPr sz="879" b="0" i="0">
+              <a:rPr sz="773" b="0" i="0">
                 <a:solidFill>
                   <a:srgbClr val="EAF7F5"/>
                 </a:solidFill>
@@ -12449,7 +12449,7 @@
           </a:p>
           <a:p>
             <a:r>
-              <a:rPr sz="879" b="0" i="0">
+              <a:rPr sz="773" b="0" i="0">
                 <a:solidFill>
                   <a:srgbClr val="EAF7F5"/>
                 </a:solidFill>
@@ -12460,7 +12460,7 @@
           </a:p>
           <a:p>
             <a:r>
-              <a:rPr sz="879" b="0" i="0">
+              <a:rPr sz="773" b="0" i="0">
                 <a:solidFill>
                   <a:srgbClr val="EAF7F5"/>
                 </a:solidFill>
@@ -12471,7 +12471,7 @@
           </a:p>
           <a:p>
             <a:r>
-              <a:rPr sz="879" b="0" i="0">
+              <a:rPr sz="773" b="0" i="0">
                 <a:solidFill>
                   <a:srgbClr val="EAF7F5"/>
                 </a:solidFill>
@@ -12482,7 +12482,7 @@
           </a:p>
           <a:p>
             <a:r>
-              <a:rPr sz="879" b="0" i="0">
+              <a:rPr sz="773" b="0" i="0">
                 <a:solidFill>
                   <a:srgbClr val="EAF7F5"/>
                 </a:solidFill>
@@ -12493,7 +12493,7 @@
           </a:p>
           <a:p>
             <a:r>
-              <a:rPr sz="879" b="0" i="0">
+              <a:rPr sz="773" b="0" i="0">
                 <a:solidFill>
                   <a:srgbClr val="EAF7F5"/>
                 </a:solidFill>
@@ -12504,7 +12504,7 @@
           </a:p>
           <a:p>
             <a:r>
-              <a:rPr sz="879" b="0" i="0">
+              <a:rPr sz="773" b="0" i="0">
                 <a:solidFill>
                   <a:srgbClr val="EAF7F5"/>
                 </a:solidFill>
@@ -12515,7 +12515,7 @@
           </a:p>
           <a:p>
             <a:r>
-              <a:rPr sz="879" b="0" i="0">
+              <a:rPr sz="773" b="0" i="0">
                 <a:solidFill>
                   <a:srgbClr val="EAF7F5"/>
                 </a:solidFill>
@@ -12526,7 +12526,7 @@
           </a:p>
           <a:p>
             <a:r>
-              <a:rPr sz="879" b="0" i="0">
+              <a:rPr sz="773" b="0" i="0">
                 <a:solidFill>
                   <a:srgbClr val="EAF7F5"/>
                 </a:solidFill>
@@ -12814,13 +12814,13 @@
           <a:noFill/>
         </p:spPr>
         <p:txBody>
-          <a:bodyPr wrap="square" lIns="0" rIns="0" tIns="0" bIns="0" anchor="t">
-            <a:spAutoFit/>
-          </a:bodyPr>
-          <a:lstStyle/>
-          <a:p>
-            <a:r>
-              <a:rPr sz="1019" b="0" i="0">
+          <a:bodyPr wrap="none" lIns="0" rIns="0" tIns="0" bIns="0" anchor="t">
+            <a:spAutoFit/>
+          </a:bodyPr>
+          <a:lstStyle/>
+          <a:p>
+            <a:r>
+              <a:rPr sz="897" b="0" i="0">
                 <a:solidFill>
                   <a:srgbClr val="EAF7F5"/>
                 </a:solidFill>
@@ -12831,7 +12831,7 @@
           </a:p>
           <a:p>
             <a:r>
-              <a:rPr sz="1019" b="0" i="0">
+              <a:rPr sz="897" b="0" i="0">
                 <a:solidFill>
                   <a:srgbClr val="EAF7F5"/>
                 </a:solidFill>
@@ -12842,7 +12842,7 @@
           </a:p>
           <a:p>
             <a:r>
-              <a:rPr sz="1019" b="0" i="0">
+              <a:rPr sz="897" b="0" i="0">
                 <a:solidFill>
                   <a:srgbClr val="EAF7F5"/>
                 </a:solidFill>
@@ -12853,7 +12853,7 @@
           </a:p>
           <a:p>
             <a:r>
-              <a:rPr sz="1019" b="0" i="0">
+              <a:rPr sz="897" b="0" i="0">
                 <a:solidFill>
                   <a:srgbClr val="EAF7F5"/>
                 </a:solidFill>
@@ -12864,7 +12864,7 @@
           </a:p>
           <a:p>
             <a:r>
-              <a:rPr sz="1019" b="0" i="0">
+              <a:rPr sz="897" b="0" i="0">
                 <a:solidFill>
                   <a:srgbClr val="EAF7F5"/>
                 </a:solidFill>
@@ -12875,7 +12875,7 @@
           </a:p>
           <a:p>
             <a:r>
-              <a:rPr sz="1019" b="0" i="0">
+              <a:rPr sz="897" b="0" i="0">
                 <a:solidFill>
                   <a:srgbClr val="EAF7F5"/>
                 </a:solidFill>
@@ -12886,7 +12886,7 @@
           </a:p>
           <a:p>
             <a:r>
-              <a:rPr sz="1019" b="0" i="0">
+              <a:rPr sz="897" b="0" i="0">
                 <a:solidFill>
                   <a:srgbClr val="EAF7F5"/>
                 </a:solidFill>
@@ -12897,7 +12897,7 @@
           </a:p>
           <a:p>
             <a:r>
-              <a:rPr sz="1019" b="0" i="0">
+              <a:rPr sz="897" b="0" i="0">
                 <a:solidFill>
                   <a:srgbClr val="EAF7F5"/>
                 </a:solidFill>
@@ -19556,13 +19556,13 @@
           <a:noFill/>
         </p:spPr>
         <p:txBody>
-          <a:bodyPr wrap="square" lIns="0" rIns="0" tIns="0" bIns="0" anchor="t">
-            <a:spAutoFit/>
-          </a:bodyPr>
-          <a:lstStyle/>
-          <a:p>
-            <a:r>
-              <a:rPr sz="1214" b="0" i="0">
+          <a:bodyPr wrap="none" lIns="0" rIns="0" tIns="0" bIns="0" anchor="t">
+            <a:spAutoFit/>
+          </a:bodyPr>
+          <a:lstStyle/>
+          <a:p>
+            <a:r>
+              <a:rPr sz="1068" b="0" i="0">
                 <a:solidFill>
                   <a:srgbClr val="EAF7F5"/>
                 </a:solidFill>
@@ -19573,7 +19573,7 @@
           </a:p>
           <a:p>
             <a:r>
-              <a:rPr sz="1214" b="0" i="0">
+              <a:rPr sz="1068" b="0" i="0">
                 <a:solidFill>
                   <a:srgbClr val="EAF7F5"/>
                 </a:solidFill>
@@ -19584,7 +19584,7 @@
           </a:p>
           <a:p>
             <a:r>
-              <a:rPr sz="1214" b="0" i="0">
+              <a:rPr sz="1068" b="0" i="0">
                 <a:solidFill>
                   <a:srgbClr val="EAF7F5"/>
                 </a:solidFill>
@@ -19595,7 +19595,7 @@
           </a:p>
           <a:p>
             <a:r>
-              <a:rPr sz="1214" b="0" i="0">
+              <a:rPr sz="1068" b="0" i="0">
                 <a:solidFill>
                   <a:srgbClr val="EAF7F5"/>
                 </a:solidFill>
@@ -19606,7 +19606,7 @@
           </a:p>
           <a:p>
             <a:r>
-              <a:rPr sz="1214" b="0" i="0">
+              <a:rPr sz="1068" b="0" i="0">
                 <a:solidFill>
                   <a:srgbClr val="EAF7F5"/>
                 </a:solidFill>
@@ -19617,7 +19617,7 @@
           </a:p>
           <a:p>
             <a:r>
-              <a:rPr sz="1214" b="0" i="0">
+              <a:rPr sz="1068" b="0" i="0">
                 <a:solidFill>
                   <a:srgbClr val="EAF7F5"/>
                 </a:solidFill>
@@ -19628,7 +19628,7 @@
           </a:p>
           <a:p>
             <a:r>
-              <a:rPr sz="1214" b="0" i="0">
+              <a:rPr sz="1068" b="0" i="0">
                 <a:solidFill>
                   <a:srgbClr val="EAF7F5"/>
                 </a:solidFill>
@@ -19639,7 +19639,7 @@
           </a:p>
           <a:p>
             <a:r>
-              <a:rPr sz="1214" b="0" i="0">
+              <a:rPr sz="1068" b="0" i="0">
                 <a:solidFill>
                   <a:srgbClr val="EAF7F5"/>
                 </a:solidFill>
@@ -19650,7 +19650,7 @@
           </a:p>
           <a:p>
             <a:r>
-              <a:rPr sz="1214" b="0" i="0">
+              <a:rPr sz="1068" b="0" i="0">
                 <a:solidFill>
                   <a:srgbClr val="EAF7F5"/>
                 </a:solidFill>
@@ -19661,7 +19661,7 @@
           </a:p>
           <a:p>
             <a:r>
-              <a:rPr sz="1214" b="0" i="0">
+              <a:rPr sz="1068" b="0" i="0">
                 <a:solidFill>
                   <a:srgbClr val="EAF7F5"/>
                 </a:solidFill>
@@ -19672,7 +19672,7 @@
           </a:p>
           <a:p>
             <a:r>
-              <a:rPr sz="1214" b="0" i="0">
+              <a:rPr sz="1068" b="0" i="0">
                 <a:solidFill>
                   <a:srgbClr val="EAF7F5"/>
                 </a:solidFill>
